--- a/主你永遠與我同在.pptx
+++ b/主你永遠與我同在.pptx
@@ -159,7 +159,7 @@
           <a:lstStyle/>
           <a:p>
             <a:r>
-              <a:rPr lang="en-US" altLang="zh-TW" smtClean="0"/>
+              <a:rPr lang="en-US" altLang="zh-TW"/>
               <a:t>Click to edit Master title style</a:t>
             </a:r>
             <a:endParaRPr lang="zh-TW" altLang="en-US"/>
@@ -278,7 +278,7 @@
           </a:lstStyle>
           <a:p>
             <a:r>
-              <a:rPr lang="en-US" altLang="zh-TW" smtClean="0"/>
+              <a:rPr lang="en-US" altLang="zh-TW"/>
               <a:t>Click to edit Master subtitle style</a:t>
             </a:r>
             <a:endParaRPr lang="zh-TW" altLang="en-US"/>
@@ -302,7 +302,7 @@
           <a:p>
             <a:fld id="{51E03D83-76E9-47BE-9E3E-C113360851A7}" type="datetimeFigureOut">
               <a:rPr lang="vi-VN" smtClean="0"/>
-              <a:t>05/08/2023</a:t>
+              <a:t>14/02/2025</a:t>
             </a:fld>
             <a:endParaRPr lang="vi-VN"/>
           </a:p>
@@ -396,7 +396,7 @@
           <a:lstStyle/>
           <a:p>
             <a:r>
-              <a:rPr lang="en-US" altLang="zh-TW" smtClean="0"/>
+              <a:rPr lang="en-US" altLang="zh-TW"/>
               <a:t>Click to edit Master title style</a:t>
             </a:r>
             <a:endParaRPr lang="zh-TW" altLang="en-US"/>
@@ -420,35 +420,35 @@
           <a:p>
             <a:pPr lvl="0"/>
             <a:r>
-              <a:rPr lang="en-US" altLang="zh-TW" smtClean="0"/>
+              <a:rPr lang="en-US" altLang="zh-TW"/>
               <a:t>Edit Master text styles</a:t>
             </a:r>
           </a:p>
           <a:p>
             <a:pPr lvl="1"/>
             <a:r>
-              <a:rPr lang="en-US" altLang="zh-TW" smtClean="0"/>
+              <a:rPr lang="en-US" altLang="zh-TW"/>
               <a:t>Second level</a:t>
             </a:r>
           </a:p>
           <a:p>
             <a:pPr lvl="2"/>
             <a:r>
-              <a:rPr lang="en-US" altLang="zh-TW" smtClean="0"/>
+              <a:rPr lang="en-US" altLang="zh-TW"/>
               <a:t>Third level</a:t>
             </a:r>
           </a:p>
           <a:p>
             <a:pPr lvl="3"/>
             <a:r>
-              <a:rPr lang="en-US" altLang="zh-TW" smtClean="0"/>
+              <a:rPr lang="en-US" altLang="zh-TW"/>
               <a:t>Fourth level</a:t>
             </a:r>
           </a:p>
           <a:p>
             <a:pPr lvl="4"/>
             <a:r>
-              <a:rPr lang="en-US" altLang="zh-TW" smtClean="0"/>
+              <a:rPr lang="en-US" altLang="zh-TW"/>
               <a:t>Fifth level</a:t>
             </a:r>
             <a:endParaRPr lang="zh-TW" altLang="en-US"/>
@@ -472,7 +472,7 @@
           <a:p>
             <a:fld id="{51E03D83-76E9-47BE-9E3E-C113360851A7}" type="datetimeFigureOut">
               <a:rPr lang="vi-VN" smtClean="0"/>
-              <a:t>05/08/2023</a:t>
+              <a:t>14/02/2025</a:t>
             </a:fld>
             <a:endParaRPr lang="vi-VN"/>
           </a:p>
@@ -571,7 +571,7 @@
           <a:lstStyle/>
           <a:p>
             <a:r>
-              <a:rPr lang="en-US" altLang="zh-TW" smtClean="0"/>
+              <a:rPr lang="en-US" altLang="zh-TW"/>
               <a:t>Click to edit Master title style</a:t>
             </a:r>
             <a:endParaRPr lang="zh-TW" altLang="en-US"/>
@@ -600,35 +600,35 @@
           <a:p>
             <a:pPr lvl="0"/>
             <a:r>
-              <a:rPr lang="en-US" altLang="zh-TW" smtClean="0"/>
+              <a:rPr lang="en-US" altLang="zh-TW"/>
               <a:t>Edit Master text styles</a:t>
             </a:r>
           </a:p>
           <a:p>
             <a:pPr lvl="1"/>
             <a:r>
-              <a:rPr lang="en-US" altLang="zh-TW" smtClean="0"/>
+              <a:rPr lang="en-US" altLang="zh-TW"/>
               <a:t>Second level</a:t>
             </a:r>
           </a:p>
           <a:p>
             <a:pPr lvl="2"/>
             <a:r>
-              <a:rPr lang="en-US" altLang="zh-TW" smtClean="0"/>
+              <a:rPr lang="en-US" altLang="zh-TW"/>
               <a:t>Third level</a:t>
             </a:r>
           </a:p>
           <a:p>
             <a:pPr lvl="3"/>
             <a:r>
-              <a:rPr lang="en-US" altLang="zh-TW" smtClean="0"/>
+              <a:rPr lang="en-US" altLang="zh-TW"/>
               <a:t>Fourth level</a:t>
             </a:r>
           </a:p>
           <a:p>
             <a:pPr lvl="4"/>
             <a:r>
-              <a:rPr lang="en-US" altLang="zh-TW" smtClean="0"/>
+              <a:rPr lang="en-US" altLang="zh-TW"/>
               <a:t>Fifth level</a:t>
             </a:r>
             <a:endParaRPr lang="zh-TW" altLang="en-US"/>
@@ -652,7 +652,7 @@
           <a:p>
             <a:fld id="{51E03D83-76E9-47BE-9E3E-C113360851A7}" type="datetimeFigureOut">
               <a:rPr lang="vi-VN" smtClean="0"/>
-              <a:t>05/08/2023</a:t>
+              <a:t>14/02/2025</a:t>
             </a:fld>
             <a:endParaRPr lang="vi-VN"/>
           </a:p>
@@ -746,7 +746,7 @@
           <a:lstStyle/>
           <a:p>
             <a:r>
-              <a:rPr lang="en-US" altLang="zh-TW" smtClean="0"/>
+              <a:rPr lang="en-US" altLang="zh-TW"/>
               <a:t>Click to edit Master title style</a:t>
             </a:r>
             <a:endParaRPr lang="zh-TW" altLang="en-US"/>
@@ -770,35 +770,35 @@
           <a:p>
             <a:pPr lvl="0"/>
             <a:r>
-              <a:rPr lang="en-US" altLang="zh-TW" smtClean="0"/>
+              <a:rPr lang="en-US" altLang="zh-TW"/>
               <a:t>Edit Master text styles</a:t>
             </a:r>
           </a:p>
           <a:p>
             <a:pPr lvl="1"/>
             <a:r>
-              <a:rPr lang="en-US" altLang="zh-TW" smtClean="0"/>
+              <a:rPr lang="en-US" altLang="zh-TW"/>
               <a:t>Second level</a:t>
             </a:r>
           </a:p>
           <a:p>
             <a:pPr lvl="2"/>
             <a:r>
-              <a:rPr lang="en-US" altLang="zh-TW" smtClean="0"/>
+              <a:rPr lang="en-US" altLang="zh-TW"/>
               <a:t>Third level</a:t>
             </a:r>
           </a:p>
           <a:p>
             <a:pPr lvl="3"/>
             <a:r>
-              <a:rPr lang="en-US" altLang="zh-TW" smtClean="0"/>
+              <a:rPr lang="en-US" altLang="zh-TW"/>
               <a:t>Fourth level</a:t>
             </a:r>
           </a:p>
           <a:p>
             <a:pPr lvl="4"/>
             <a:r>
-              <a:rPr lang="en-US" altLang="zh-TW" smtClean="0"/>
+              <a:rPr lang="en-US" altLang="zh-TW"/>
               <a:t>Fifth level</a:t>
             </a:r>
             <a:endParaRPr lang="zh-TW" altLang="en-US"/>
@@ -822,7 +822,7 @@
           <a:p>
             <a:fld id="{51E03D83-76E9-47BE-9E3E-C113360851A7}" type="datetimeFigureOut">
               <a:rPr lang="vi-VN" smtClean="0"/>
-              <a:t>05/08/2023</a:t>
+              <a:t>14/02/2025</a:t>
             </a:fld>
             <a:endParaRPr lang="vi-VN"/>
           </a:p>
@@ -925,7 +925,7 @@
           </a:lstStyle>
           <a:p>
             <a:r>
-              <a:rPr lang="en-US" altLang="zh-TW" smtClean="0"/>
+              <a:rPr lang="en-US" altLang="zh-TW"/>
               <a:t>Click to edit Master title style</a:t>
             </a:r>
             <a:endParaRPr lang="zh-TW" altLang="en-US"/>
@@ -1045,7 +1045,7 @@
           <a:p>
             <a:pPr lvl="0"/>
             <a:r>
-              <a:rPr lang="en-US" altLang="zh-TW" smtClean="0"/>
+              <a:rPr lang="en-US" altLang="zh-TW"/>
               <a:t>Edit Master text styles</a:t>
             </a:r>
           </a:p>
@@ -1068,7 +1068,7 @@
           <a:p>
             <a:fld id="{51E03D83-76E9-47BE-9E3E-C113360851A7}" type="datetimeFigureOut">
               <a:rPr lang="vi-VN" smtClean="0"/>
-              <a:t>05/08/2023</a:t>
+              <a:t>14/02/2025</a:t>
             </a:fld>
             <a:endParaRPr lang="vi-VN"/>
           </a:p>
@@ -1162,7 +1162,7 @@
           <a:lstStyle/>
           <a:p>
             <a:r>
-              <a:rPr lang="en-US" altLang="zh-TW" smtClean="0"/>
+              <a:rPr lang="en-US" altLang="zh-TW"/>
               <a:t>Click to edit Master title style</a:t>
             </a:r>
             <a:endParaRPr lang="zh-TW" altLang="en-US"/>
@@ -1219,35 +1219,35 @@
           <a:p>
             <a:pPr lvl="0"/>
             <a:r>
-              <a:rPr lang="en-US" altLang="zh-TW" smtClean="0"/>
+              <a:rPr lang="en-US" altLang="zh-TW"/>
               <a:t>Edit Master text styles</a:t>
             </a:r>
           </a:p>
           <a:p>
             <a:pPr lvl="1"/>
             <a:r>
-              <a:rPr lang="en-US" altLang="zh-TW" smtClean="0"/>
+              <a:rPr lang="en-US" altLang="zh-TW"/>
               <a:t>Second level</a:t>
             </a:r>
           </a:p>
           <a:p>
             <a:pPr lvl="2"/>
             <a:r>
-              <a:rPr lang="en-US" altLang="zh-TW" smtClean="0"/>
+              <a:rPr lang="en-US" altLang="zh-TW"/>
               <a:t>Third level</a:t>
             </a:r>
           </a:p>
           <a:p>
             <a:pPr lvl="3"/>
             <a:r>
-              <a:rPr lang="en-US" altLang="zh-TW" smtClean="0"/>
+              <a:rPr lang="en-US" altLang="zh-TW"/>
               <a:t>Fourth level</a:t>
             </a:r>
           </a:p>
           <a:p>
             <a:pPr lvl="4"/>
             <a:r>
-              <a:rPr lang="en-US" altLang="zh-TW" smtClean="0"/>
+              <a:rPr lang="en-US" altLang="zh-TW"/>
               <a:t>Fifth level</a:t>
             </a:r>
             <a:endParaRPr lang="zh-TW" altLang="en-US"/>
@@ -1304,35 +1304,35 @@
           <a:p>
             <a:pPr lvl="0"/>
             <a:r>
-              <a:rPr lang="en-US" altLang="zh-TW" smtClean="0"/>
+              <a:rPr lang="en-US" altLang="zh-TW"/>
               <a:t>Edit Master text styles</a:t>
             </a:r>
           </a:p>
           <a:p>
             <a:pPr lvl="1"/>
             <a:r>
-              <a:rPr lang="en-US" altLang="zh-TW" smtClean="0"/>
+              <a:rPr lang="en-US" altLang="zh-TW"/>
               <a:t>Second level</a:t>
             </a:r>
           </a:p>
           <a:p>
             <a:pPr lvl="2"/>
             <a:r>
-              <a:rPr lang="en-US" altLang="zh-TW" smtClean="0"/>
+              <a:rPr lang="en-US" altLang="zh-TW"/>
               <a:t>Third level</a:t>
             </a:r>
           </a:p>
           <a:p>
             <a:pPr lvl="3"/>
             <a:r>
-              <a:rPr lang="en-US" altLang="zh-TW" smtClean="0"/>
+              <a:rPr lang="en-US" altLang="zh-TW"/>
               <a:t>Fourth level</a:t>
             </a:r>
           </a:p>
           <a:p>
             <a:pPr lvl="4"/>
             <a:r>
-              <a:rPr lang="en-US" altLang="zh-TW" smtClean="0"/>
+              <a:rPr lang="en-US" altLang="zh-TW"/>
               <a:t>Fifth level</a:t>
             </a:r>
             <a:endParaRPr lang="zh-TW" altLang="en-US"/>
@@ -1356,7 +1356,7 @@
           <a:p>
             <a:fld id="{51E03D83-76E9-47BE-9E3E-C113360851A7}" type="datetimeFigureOut">
               <a:rPr lang="vi-VN" smtClean="0"/>
-              <a:t>05/08/2023</a:t>
+              <a:t>14/02/2025</a:t>
             </a:fld>
             <a:endParaRPr lang="vi-VN"/>
           </a:p>
@@ -1454,7 +1454,7 @@
           </a:lstStyle>
           <a:p>
             <a:r>
-              <a:rPr lang="en-US" altLang="zh-TW" smtClean="0"/>
+              <a:rPr lang="en-US" altLang="zh-TW"/>
               <a:t>Click to edit Master title style</a:t>
             </a:r>
             <a:endParaRPr lang="zh-TW" altLang="en-US"/>
@@ -1520,7 +1520,7 @@
           <a:p>
             <a:pPr lvl="0"/>
             <a:r>
-              <a:rPr lang="en-US" altLang="zh-TW" smtClean="0"/>
+              <a:rPr lang="en-US" altLang="zh-TW"/>
               <a:t>Edit Master text styles</a:t>
             </a:r>
           </a:p>
@@ -1576,35 +1576,35 @@
           <a:p>
             <a:pPr lvl="0"/>
             <a:r>
-              <a:rPr lang="en-US" altLang="zh-TW" smtClean="0"/>
+              <a:rPr lang="en-US" altLang="zh-TW"/>
               <a:t>Edit Master text styles</a:t>
             </a:r>
           </a:p>
           <a:p>
             <a:pPr lvl="1"/>
             <a:r>
-              <a:rPr lang="en-US" altLang="zh-TW" smtClean="0"/>
+              <a:rPr lang="en-US" altLang="zh-TW"/>
               <a:t>Second level</a:t>
             </a:r>
           </a:p>
           <a:p>
             <a:pPr lvl="2"/>
             <a:r>
-              <a:rPr lang="en-US" altLang="zh-TW" smtClean="0"/>
+              <a:rPr lang="en-US" altLang="zh-TW"/>
               <a:t>Third level</a:t>
             </a:r>
           </a:p>
           <a:p>
             <a:pPr lvl="3"/>
             <a:r>
-              <a:rPr lang="en-US" altLang="zh-TW" smtClean="0"/>
+              <a:rPr lang="en-US" altLang="zh-TW"/>
               <a:t>Fourth level</a:t>
             </a:r>
           </a:p>
           <a:p>
             <a:pPr lvl="4"/>
             <a:r>
-              <a:rPr lang="en-US" altLang="zh-TW" smtClean="0"/>
+              <a:rPr lang="en-US" altLang="zh-TW"/>
               <a:t>Fifth level</a:t>
             </a:r>
             <a:endParaRPr lang="zh-TW" altLang="en-US"/>
@@ -1670,7 +1670,7 @@
           <a:p>
             <a:pPr lvl="0"/>
             <a:r>
-              <a:rPr lang="en-US" altLang="zh-TW" smtClean="0"/>
+              <a:rPr lang="en-US" altLang="zh-TW"/>
               <a:t>Edit Master text styles</a:t>
             </a:r>
           </a:p>
@@ -1726,35 +1726,35 @@
           <a:p>
             <a:pPr lvl="0"/>
             <a:r>
-              <a:rPr lang="en-US" altLang="zh-TW" smtClean="0"/>
+              <a:rPr lang="en-US" altLang="zh-TW"/>
               <a:t>Edit Master text styles</a:t>
             </a:r>
           </a:p>
           <a:p>
             <a:pPr lvl="1"/>
             <a:r>
-              <a:rPr lang="en-US" altLang="zh-TW" smtClean="0"/>
+              <a:rPr lang="en-US" altLang="zh-TW"/>
               <a:t>Second level</a:t>
             </a:r>
           </a:p>
           <a:p>
             <a:pPr lvl="2"/>
             <a:r>
-              <a:rPr lang="en-US" altLang="zh-TW" smtClean="0"/>
+              <a:rPr lang="en-US" altLang="zh-TW"/>
               <a:t>Third level</a:t>
             </a:r>
           </a:p>
           <a:p>
             <a:pPr lvl="3"/>
             <a:r>
-              <a:rPr lang="en-US" altLang="zh-TW" smtClean="0"/>
+              <a:rPr lang="en-US" altLang="zh-TW"/>
               <a:t>Fourth level</a:t>
             </a:r>
           </a:p>
           <a:p>
             <a:pPr lvl="4"/>
             <a:r>
-              <a:rPr lang="en-US" altLang="zh-TW" smtClean="0"/>
+              <a:rPr lang="en-US" altLang="zh-TW"/>
               <a:t>Fifth level</a:t>
             </a:r>
             <a:endParaRPr lang="zh-TW" altLang="en-US"/>
@@ -1778,7 +1778,7 @@
           <a:p>
             <a:fld id="{51E03D83-76E9-47BE-9E3E-C113360851A7}" type="datetimeFigureOut">
               <a:rPr lang="vi-VN" smtClean="0"/>
-              <a:t>05/08/2023</a:t>
+              <a:t>14/02/2025</a:t>
             </a:fld>
             <a:endParaRPr lang="vi-VN"/>
           </a:p>
@@ -1872,7 +1872,7 @@
           <a:lstStyle/>
           <a:p>
             <a:r>
-              <a:rPr lang="en-US" altLang="zh-TW" smtClean="0"/>
+              <a:rPr lang="en-US" altLang="zh-TW"/>
               <a:t>Click to edit Master title style</a:t>
             </a:r>
             <a:endParaRPr lang="zh-TW" altLang="en-US"/>
@@ -1896,7 +1896,7 @@
           <a:p>
             <a:fld id="{51E03D83-76E9-47BE-9E3E-C113360851A7}" type="datetimeFigureOut">
               <a:rPr lang="vi-VN" smtClean="0"/>
-              <a:t>05/08/2023</a:t>
+              <a:t>14/02/2025</a:t>
             </a:fld>
             <a:endParaRPr lang="vi-VN"/>
           </a:p>
@@ -1991,7 +1991,7 @@
           <a:p>
             <a:fld id="{51E03D83-76E9-47BE-9E3E-C113360851A7}" type="datetimeFigureOut">
               <a:rPr lang="vi-VN" smtClean="0"/>
-              <a:t>05/08/2023</a:t>
+              <a:t>14/02/2025</a:t>
             </a:fld>
             <a:endParaRPr lang="vi-VN"/>
           </a:p>
@@ -2094,7 +2094,7 @@
           </a:lstStyle>
           <a:p>
             <a:r>
-              <a:rPr lang="en-US" altLang="zh-TW" smtClean="0"/>
+              <a:rPr lang="en-US" altLang="zh-TW"/>
               <a:t>Click to edit Master title style</a:t>
             </a:r>
             <a:endParaRPr lang="zh-TW" altLang="en-US"/>
@@ -2151,35 +2151,35 @@
           <a:p>
             <a:pPr lvl="0"/>
             <a:r>
-              <a:rPr lang="en-US" altLang="zh-TW" smtClean="0"/>
+              <a:rPr lang="en-US" altLang="zh-TW"/>
               <a:t>Edit Master text styles</a:t>
             </a:r>
           </a:p>
           <a:p>
             <a:pPr lvl="1"/>
             <a:r>
-              <a:rPr lang="en-US" altLang="zh-TW" smtClean="0"/>
+              <a:rPr lang="en-US" altLang="zh-TW"/>
               <a:t>Second level</a:t>
             </a:r>
           </a:p>
           <a:p>
             <a:pPr lvl="2"/>
             <a:r>
-              <a:rPr lang="en-US" altLang="zh-TW" smtClean="0"/>
+              <a:rPr lang="en-US" altLang="zh-TW"/>
               <a:t>Third level</a:t>
             </a:r>
           </a:p>
           <a:p>
             <a:pPr lvl="3"/>
             <a:r>
-              <a:rPr lang="en-US" altLang="zh-TW" smtClean="0"/>
+              <a:rPr lang="en-US" altLang="zh-TW"/>
               <a:t>Fourth level</a:t>
             </a:r>
           </a:p>
           <a:p>
             <a:pPr lvl="4"/>
             <a:r>
-              <a:rPr lang="en-US" altLang="zh-TW" smtClean="0"/>
+              <a:rPr lang="en-US" altLang="zh-TW"/>
               <a:t>Fifth level</a:t>
             </a:r>
             <a:endParaRPr lang="zh-TW" altLang="en-US"/>
@@ -2245,7 +2245,7 @@
           <a:p>
             <a:pPr lvl="0"/>
             <a:r>
-              <a:rPr lang="en-US" altLang="zh-TW" smtClean="0"/>
+              <a:rPr lang="en-US" altLang="zh-TW"/>
               <a:t>Edit Master text styles</a:t>
             </a:r>
           </a:p>
@@ -2268,7 +2268,7 @@
           <a:p>
             <a:fld id="{51E03D83-76E9-47BE-9E3E-C113360851A7}" type="datetimeFigureOut">
               <a:rPr lang="vi-VN" smtClean="0"/>
-              <a:t>05/08/2023</a:t>
+              <a:t>14/02/2025</a:t>
             </a:fld>
             <a:endParaRPr lang="vi-VN"/>
           </a:p>
@@ -2371,7 +2371,7 @@
           </a:lstStyle>
           <a:p>
             <a:r>
-              <a:rPr lang="en-US" altLang="zh-TW" smtClean="0"/>
+              <a:rPr lang="en-US" altLang="zh-TW"/>
               <a:t>Click to edit Master title style</a:t>
             </a:r>
             <a:endParaRPr lang="zh-TW" altLang="en-US"/>
@@ -2436,7 +2436,7 @@
           </a:lstStyle>
           <a:p>
             <a:r>
-              <a:rPr lang="en-US" altLang="zh-TW" smtClean="0"/>
+              <a:rPr lang="en-US" altLang="zh-TW"/>
               <a:t>Click icon to add picture</a:t>
             </a:r>
             <a:endParaRPr lang="zh-TW" altLang="en-US"/>
@@ -2502,7 +2502,7 @@
           <a:p>
             <a:pPr lvl="0"/>
             <a:r>
-              <a:rPr lang="en-US" altLang="zh-TW" smtClean="0"/>
+              <a:rPr lang="en-US" altLang="zh-TW"/>
               <a:t>Edit Master text styles</a:t>
             </a:r>
           </a:p>
@@ -2525,7 +2525,7 @@
           <a:p>
             <a:fld id="{51E03D83-76E9-47BE-9E3E-C113360851A7}" type="datetimeFigureOut">
               <a:rPr lang="vi-VN" smtClean="0"/>
-              <a:t>05/08/2023</a:t>
+              <a:t>14/02/2025</a:t>
             </a:fld>
             <a:endParaRPr lang="vi-VN"/>
           </a:p>
@@ -2639,10 +2639,9 @@
           <a:lstStyle/>
           <a:p>
             <a:r>
-              <a:rPr lang="zh-TW" altLang="en-US" smtClean="0"/>
+              <a:rPr lang="zh-TW" altLang="en-US"/>
               <a:t>按一下以編輯母片標題樣式</a:t>
             </a:r>
-            <a:endParaRPr lang="zh-TW" altLang="en-US"/>
           </a:p>
         </p:txBody>
       </p:sp>
@@ -2673,38 +2672,37 @@
           <a:p>
             <a:pPr lvl="0"/>
             <a:r>
-              <a:rPr lang="zh-TW" altLang="en-US" smtClean="0"/>
+              <a:rPr lang="zh-TW" altLang="en-US"/>
               <a:t>按一下以編輯母片文字樣式</a:t>
             </a:r>
           </a:p>
           <a:p>
             <a:pPr lvl="1"/>
             <a:r>
-              <a:rPr lang="zh-TW" altLang="en-US" smtClean="0"/>
+              <a:rPr lang="zh-TW" altLang="en-US"/>
               <a:t>第二層</a:t>
             </a:r>
           </a:p>
           <a:p>
             <a:pPr lvl="2"/>
             <a:r>
-              <a:rPr lang="zh-TW" altLang="en-US" smtClean="0"/>
+              <a:rPr lang="zh-TW" altLang="en-US"/>
               <a:t>第三層</a:t>
             </a:r>
           </a:p>
           <a:p>
             <a:pPr lvl="3"/>
             <a:r>
-              <a:rPr lang="zh-TW" altLang="en-US" smtClean="0"/>
+              <a:rPr lang="zh-TW" altLang="en-US"/>
               <a:t>第四層</a:t>
             </a:r>
           </a:p>
           <a:p>
             <a:pPr lvl="4"/>
             <a:r>
-              <a:rPr lang="zh-TW" altLang="en-US" smtClean="0"/>
+              <a:rPr lang="zh-TW" altLang="en-US"/>
               <a:t>第五層</a:t>
             </a:r>
-            <a:endParaRPr lang="zh-TW" altLang="en-US"/>
           </a:p>
         </p:txBody>
       </p:sp>
@@ -2743,7 +2741,7 @@
           <a:p>
             <a:fld id="{51E03D83-76E9-47BE-9E3E-C113360851A7}" type="datetimeFigureOut">
               <a:rPr lang="vi-VN" smtClean="0"/>
-              <a:t>05/08/2023</a:t>
+              <a:t>14/02/2025</a:t>
             </a:fld>
             <a:endParaRPr lang="vi-VN"/>
           </a:p>
@@ -3141,7 +3139,7 @@
           <a:lstStyle/>
           <a:p>
             <a:r>
-              <a:rPr lang="zh-TW" altLang="en-US" sz="7200" b="1" i="1" dirty="0" smtClean="0">
+              <a:rPr lang="zh-TW" altLang="en-US" sz="7200" b="1" i="1" dirty="0">
                 <a:solidFill>
                   <a:srgbClr val="000066"/>
                 </a:solidFill>
@@ -3158,7 +3156,7 @@
               <a:t>主</a:t>
             </a:r>
             <a:r>
-              <a:rPr lang="zh-CN" altLang="en-US" sz="7200" b="1" i="1" dirty="0" smtClean="0">
+              <a:rPr lang="zh-CN" altLang="en-US" sz="7200" b="1" i="1" dirty="0">
                 <a:solidFill>
                   <a:srgbClr val="000066"/>
                 </a:solidFill>
@@ -3175,7 +3173,7 @@
               <a:t>祢</a:t>
             </a:r>
             <a:r>
-              <a:rPr lang="zh-TW" altLang="en-US" sz="7200" b="1" i="1" dirty="0" smtClean="0">
+              <a:rPr lang="zh-TW" altLang="en-US" sz="7200" b="1" i="1" dirty="0">
                 <a:solidFill>
                   <a:srgbClr val="000066"/>
                 </a:solidFill>
@@ -3189,24 +3187,7 @@
                 <a:latin typeface="微軟正黑體" pitchFamily="34" charset="-120"/>
                 <a:ea typeface="微軟正黑體" pitchFamily="34" charset="-120"/>
               </a:rPr>
-              <a:t>永</a:t>
-            </a:r>
-            <a:r>
-              <a:rPr lang="zh-TW" altLang="en-US" sz="7200" b="1" i="1" dirty="0">
-                <a:solidFill>
-                  <a:srgbClr val="000066"/>
-                </a:solidFill>
-                <a:effectLst>
-                  <a:outerShdw blurRad="38100" dist="38100" dir="2700000" algn="tl">
-                    <a:srgbClr val="000000">
-                      <a:alpha val="43137"/>
-                    </a:srgbClr>
-                  </a:outerShdw>
-                </a:effectLst>
-                <a:latin typeface="微軟正黑體" pitchFamily="34" charset="-120"/>
-                <a:ea typeface="微軟正黑體" pitchFamily="34" charset="-120"/>
-              </a:rPr>
-              <a:t>遠與我同在</a:t>
+              <a:t>永遠與我同在</a:t>
             </a:r>
           </a:p>
         </p:txBody>
@@ -3296,20 +3277,10 @@
                 <a:latin typeface="Microsoft JhengHei" panose="020B0604030504040204" pitchFamily="34" charset="-120"/>
                 <a:ea typeface="Microsoft JhengHei" panose="020B0604030504040204" pitchFamily="34" charset="-120"/>
               </a:rPr>
-              <a:t>我敬</a:t>
-            </a:r>
-            <a:r>
-              <a:rPr lang="zh-TW" altLang="en-US" sz="6400" b="1" dirty="0" smtClean="0">
-                <a:solidFill>
-                  <a:srgbClr val="000066"/>
-                </a:solidFill>
-                <a:latin typeface="Microsoft JhengHei" panose="020B0604030504040204" pitchFamily="34" charset="-120"/>
-                <a:ea typeface="Microsoft JhengHei" panose="020B0604030504040204" pitchFamily="34" charset="-120"/>
-              </a:rPr>
-              <a:t>拜</a:t>
-            </a:r>
-            <a:r>
-              <a:rPr lang="zh-CN" altLang="en-US" sz="6400" b="1" dirty="0" smtClean="0">
+              <a:t>我敬拜</a:t>
+            </a:r>
+            <a:r>
+              <a:rPr lang="zh-CN" altLang="en-US" sz="6400" b="1" dirty="0">
                 <a:solidFill>
                   <a:srgbClr val="000066"/>
                 </a:solidFill>
@@ -3352,7 +3323,7 @@
           <a:p>
             <a:pPr algn="ctr"/>
             <a:r>
-              <a:rPr lang="en-US" sz="4400" b="1" dirty="0" smtClean="0">
+              <a:rPr lang="en-US" sz="4400" b="1" dirty="0">
                 <a:solidFill>
                   <a:srgbClr val="000066"/>
                 </a:solidFill>
@@ -3362,17 +3333,17 @@
               <a:t>( </a:t>
             </a:r>
             <a:r>
-              <a:rPr lang="zh-CN" altLang="en-US" sz="4400" b="1" dirty="0" smtClean="0">
-                <a:solidFill>
-                  <a:srgbClr val="000066"/>
-                </a:solidFill>
-                <a:latin typeface="Microsoft JhengHei" panose="020B0604030504040204" pitchFamily="34" charset="-120"/>
-                <a:ea typeface="Microsoft JhengHei" panose="020B0604030504040204" pitchFamily="34" charset="-120"/>
-              </a:rPr>
-              <a:t>副</a:t>
-            </a:r>
-            <a:r>
-              <a:rPr lang="en-US" sz="4400" b="1" dirty="0" smtClean="0">
+              <a:rPr lang="zh-CN" altLang="en-US" sz="4400" b="1" dirty="0">
+                <a:solidFill>
+                  <a:srgbClr val="000066"/>
+                </a:solidFill>
+                <a:latin typeface="Microsoft JhengHei" panose="020B0604030504040204" pitchFamily="34" charset="-120"/>
+                <a:ea typeface="Microsoft JhengHei" panose="020B0604030504040204" pitchFamily="34" charset="-120"/>
+              </a:rPr>
+              <a:t>副歌</a:t>
+            </a:r>
+            <a:r>
+              <a:rPr lang="en-US" sz="4400" b="1" dirty="0">
                 <a:solidFill>
                   <a:srgbClr val="000066"/>
                 </a:solidFill>
@@ -3453,20 +3424,10 @@
                 <a:latin typeface="Microsoft JhengHei" panose="020B0604030504040204" pitchFamily="34" charset="-120"/>
                 <a:ea typeface="Microsoft JhengHei" panose="020B0604030504040204" pitchFamily="34" charset="-120"/>
               </a:rPr>
-              <a:t>危難臨到我信</a:t>
-            </a:r>
-            <a:r>
-              <a:rPr lang="zh-TW" altLang="en-US" sz="6400" b="1" dirty="0" smtClean="0">
-                <a:solidFill>
-                  <a:srgbClr val="000066"/>
-                </a:solidFill>
-                <a:latin typeface="Microsoft JhengHei" panose="020B0604030504040204" pitchFamily="34" charset="-120"/>
-                <a:ea typeface="Microsoft JhengHei" panose="020B0604030504040204" pitchFamily="34" charset="-120"/>
-              </a:rPr>
-              <a:t>靠</a:t>
-            </a:r>
-            <a:r>
-              <a:rPr lang="zh-CN" altLang="en-US" sz="6400" b="1" dirty="0" smtClean="0">
+              <a:t>危難臨到我信靠</a:t>
+            </a:r>
+            <a:r>
+              <a:rPr lang="zh-CN" altLang="en-US" sz="6400" b="1" dirty="0">
                 <a:solidFill>
                   <a:srgbClr val="000066"/>
                 </a:solidFill>
@@ -3495,20 +3456,10 @@
                 <a:latin typeface="Microsoft JhengHei" panose="020B0604030504040204" pitchFamily="34" charset="-120"/>
                 <a:ea typeface="Microsoft JhengHei" panose="020B0604030504040204" pitchFamily="34" charset="-120"/>
               </a:rPr>
-              <a:t>深</a:t>
-            </a:r>
-            <a:r>
-              <a:rPr lang="zh-TW" altLang="en-US" sz="6400" b="1" dirty="0" smtClean="0">
-                <a:solidFill>
-                  <a:srgbClr val="000066"/>
-                </a:solidFill>
-                <a:latin typeface="Microsoft JhengHei" panose="020B0604030504040204" pitchFamily="34" charset="-120"/>
-                <a:ea typeface="Microsoft JhengHei" panose="020B0604030504040204" pitchFamily="34" charset="-120"/>
-              </a:rPr>
-              <a:t>知</a:t>
-            </a:r>
-            <a:r>
-              <a:rPr lang="zh-CN" altLang="en-US" sz="6400" b="1" dirty="0" smtClean="0">
+              <a:t>深知</a:t>
+            </a:r>
+            <a:r>
+              <a:rPr lang="zh-CN" altLang="en-US" sz="6400" b="1" dirty="0">
                 <a:solidFill>
                   <a:srgbClr val="000066"/>
                 </a:solidFill>
@@ -3518,16 +3469,6 @@
               <a:t>祢</a:t>
             </a:r>
             <a:r>
-              <a:rPr lang="zh-TW" altLang="en-US" sz="6400" b="1" dirty="0" smtClean="0">
-                <a:solidFill>
-                  <a:srgbClr val="000066"/>
-                </a:solidFill>
-                <a:latin typeface="Microsoft JhengHei" panose="020B0604030504040204" pitchFamily="34" charset="-120"/>
-                <a:ea typeface="Microsoft JhengHei" panose="020B0604030504040204" pitchFamily="34" charset="-120"/>
-              </a:rPr>
-              <a:t>必</a:t>
-            </a:r>
-            <a:r>
               <a:rPr lang="zh-TW" altLang="en-US" sz="6400" b="1" dirty="0">
                 <a:solidFill>
                   <a:srgbClr val="000066"/>
@@ -3535,7 +3476,7 @@
                 <a:latin typeface="Microsoft JhengHei" panose="020B0604030504040204" pitchFamily="34" charset="-120"/>
                 <a:ea typeface="Microsoft JhengHei" panose="020B0604030504040204" pitchFamily="34" charset="-120"/>
               </a:rPr>
-              <a:t>領我度過</a:t>
+              <a:t>必領我度過</a:t>
             </a:r>
             <a:endParaRPr lang="en-US" altLang="zh-TW" sz="6400" b="1" dirty="0">
               <a:solidFill>
@@ -3571,7 +3512,7 @@
           <a:p>
             <a:pPr algn="ctr"/>
             <a:r>
-              <a:rPr lang="en-US" sz="4400" b="1" dirty="0" smtClean="0">
+              <a:rPr lang="en-US" sz="4400" b="1" dirty="0">
                 <a:solidFill>
                   <a:srgbClr val="000066"/>
                 </a:solidFill>
@@ -3581,17 +3522,17 @@
               <a:t>( </a:t>
             </a:r>
             <a:r>
-              <a:rPr lang="zh-CN" altLang="en-US" sz="4400" b="1" dirty="0" smtClean="0">
-                <a:solidFill>
-                  <a:srgbClr val="000066"/>
-                </a:solidFill>
-                <a:latin typeface="Microsoft JhengHei" panose="020B0604030504040204" pitchFamily="34" charset="-120"/>
-                <a:ea typeface="Microsoft JhengHei" panose="020B0604030504040204" pitchFamily="34" charset="-120"/>
-              </a:rPr>
-              <a:t>正</a:t>
-            </a:r>
-            <a:r>
-              <a:rPr lang="en-US" sz="4400" b="1" dirty="0" smtClean="0">
+              <a:rPr lang="zh-CN" altLang="en-US" sz="4400" b="1" dirty="0">
+                <a:solidFill>
+                  <a:srgbClr val="000066"/>
+                </a:solidFill>
+                <a:latin typeface="Microsoft JhengHei" panose="020B0604030504040204" pitchFamily="34" charset="-120"/>
+                <a:ea typeface="Microsoft JhengHei" panose="020B0604030504040204" pitchFamily="34" charset="-120"/>
+              </a:rPr>
+              <a:t>正歌</a:t>
+            </a:r>
+            <a:r>
+              <a:rPr lang="en-US" sz="4400" b="1" dirty="0">
                 <a:solidFill>
                   <a:srgbClr val="000066"/>
                 </a:solidFill>
@@ -3665,7 +3606,7 @@
               <a:buNone/>
             </a:pPr>
             <a:r>
-              <a:rPr lang="zh-CN" altLang="en-US" sz="6400" b="1" dirty="0" smtClean="0">
+              <a:rPr lang="zh-CN" altLang="en-US" sz="6400" b="1" dirty="0">
                 <a:solidFill>
                   <a:srgbClr val="000066"/>
                 </a:solidFill>
@@ -3675,16 +3616,6 @@
               <a:t>祢</a:t>
             </a:r>
             <a:r>
-              <a:rPr lang="zh-TW" altLang="en-US" sz="6400" b="1" dirty="0" smtClean="0">
-                <a:solidFill>
-                  <a:srgbClr val="000066"/>
-                </a:solidFill>
-                <a:latin typeface="Microsoft JhengHei" panose="020B0604030504040204" pitchFamily="34" charset="-120"/>
-                <a:ea typeface="Microsoft JhengHei" panose="020B0604030504040204" pitchFamily="34" charset="-120"/>
-              </a:rPr>
-              <a:t>信</a:t>
-            </a:r>
-            <a:r>
               <a:rPr lang="zh-TW" altLang="en-US" sz="6400" b="1" dirty="0">
                 <a:solidFill>
                   <a:srgbClr val="000066"/>
@@ -3692,7 +3623,7 @@
                 <a:latin typeface="Microsoft JhengHei" panose="020B0604030504040204" pitchFamily="34" charset="-120"/>
                 <a:ea typeface="Microsoft JhengHei" panose="020B0604030504040204" pitchFamily="34" charset="-120"/>
               </a:rPr>
-              <a:t>實為我堅持  到最後</a:t>
+              <a:t>信實為我堅持  到最後</a:t>
             </a:r>
             <a:endParaRPr lang="vi-VN" sz="6400" b="1" dirty="0">
               <a:solidFill>
@@ -3727,7 +3658,7 @@
           <a:p>
             <a:pPr algn="ctr"/>
             <a:r>
-              <a:rPr lang="en-US" sz="4400" b="1" dirty="0" smtClean="0">
+              <a:rPr lang="en-US" sz="4400" b="1" dirty="0">
                 <a:solidFill>
                   <a:srgbClr val="000066"/>
                 </a:solidFill>
@@ -3737,17 +3668,17 @@
               <a:t>( </a:t>
             </a:r>
             <a:r>
-              <a:rPr lang="zh-CN" altLang="en-US" sz="4400" b="1" dirty="0" smtClean="0">
-                <a:solidFill>
-                  <a:srgbClr val="000066"/>
-                </a:solidFill>
-                <a:latin typeface="Microsoft JhengHei" panose="020B0604030504040204" pitchFamily="34" charset="-120"/>
-                <a:ea typeface="Microsoft JhengHei" panose="020B0604030504040204" pitchFamily="34" charset="-120"/>
-              </a:rPr>
-              <a:t>正</a:t>
-            </a:r>
-            <a:r>
-              <a:rPr lang="en-US" sz="4400" b="1" dirty="0" smtClean="0">
+              <a:rPr lang="zh-CN" altLang="en-US" sz="4400" b="1" dirty="0">
+                <a:solidFill>
+                  <a:srgbClr val="000066"/>
+                </a:solidFill>
+                <a:latin typeface="Microsoft JhengHei" panose="020B0604030504040204" pitchFamily="34" charset="-120"/>
+                <a:ea typeface="Microsoft JhengHei" panose="020B0604030504040204" pitchFamily="34" charset="-120"/>
+              </a:rPr>
+              <a:t>正歌</a:t>
+            </a:r>
+            <a:r>
+              <a:rPr lang="en-US" sz="4400" b="1" dirty="0">
                 <a:solidFill>
                   <a:srgbClr val="000066"/>
                 </a:solidFill>
@@ -3843,7 +3774,7 @@
               <a:buNone/>
             </a:pPr>
             <a:r>
-              <a:rPr lang="zh-TW" altLang="en-US" sz="6400" b="1" dirty="0" smtClean="0">
+              <a:rPr lang="zh-TW" altLang="en-US" sz="6400" b="1" dirty="0">
                 <a:solidFill>
                   <a:srgbClr val="000066"/>
                 </a:solidFill>
@@ -3853,7 +3784,7 @@
               <a:t>有</a:t>
             </a:r>
             <a:r>
-              <a:rPr lang="zh-CN" altLang="en-US" sz="6400" b="1" dirty="0" smtClean="0">
+              <a:rPr lang="zh-CN" altLang="en-US" sz="6400" b="1" dirty="0">
                 <a:solidFill>
                   <a:srgbClr val="000066"/>
                 </a:solidFill>
@@ -3863,16 +3794,6 @@
               <a:t>祢</a:t>
             </a:r>
             <a:r>
-              <a:rPr lang="zh-TW" altLang="en-US" sz="6400" b="1" dirty="0" smtClean="0">
-                <a:solidFill>
-                  <a:srgbClr val="000066"/>
-                </a:solidFill>
-                <a:latin typeface="Microsoft JhengHei" panose="020B0604030504040204" pitchFamily="34" charset="-120"/>
-                <a:ea typeface="Microsoft JhengHei" panose="020B0604030504040204" pitchFamily="34" charset="-120"/>
-              </a:rPr>
-              <a:t>同</a:t>
-            </a:r>
-            <a:r>
               <a:rPr lang="zh-TW" altLang="en-US" sz="6400" b="1" dirty="0">
                 <a:solidFill>
                   <a:srgbClr val="000066"/>
@@ -3880,7 +3801,7 @@
                 <a:latin typeface="Microsoft JhengHei" panose="020B0604030504040204" pitchFamily="34" charset="-120"/>
                 <a:ea typeface="Microsoft JhengHei" panose="020B0604030504040204" pitchFamily="34" charset="-120"/>
               </a:rPr>
-              <a:t>在我不至畏懼</a:t>
+              <a:t>同在我不至畏懼</a:t>
             </a:r>
             <a:endParaRPr lang="en-US" altLang="zh-TW" sz="6400" b="1" dirty="0">
               <a:solidFill>
@@ -3916,7 +3837,7 @@
           <a:p>
             <a:pPr algn="ctr"/>
             <a:r>
-              <a:rPr lang="en-US" sz="4400" b="1" dirty="0" smtClean="0">
+              <a:rPr lang="en-US" sz="4400" b="1" dirty="0">
                 <a:solidFill>
                   <a:srgbClr val="000066"/>
                 </a:solidFill>
@@ -3926,17 +3847,17 @@
               <a:t>( </a:t>
             </a:r>
             <a:r>
-              <a:rPr lang="zh-CN" altLang="en-US" sz="4400" b="1" dirty="0" smtClean="0">
-                <a:solidFill>
-                  <a:srgbClr val="000066"/>
-                </a:solidFill>
-                <a:latin typeface="Microsoft JhengHei" panose="020B0604030504040204" pitchFamily="34" charset="-120"/>
-                <a:ea typeface="Microsoft JhengHei" panose="020B0604030504040204" pitchFamily="34" charset="-120"/>
-              </a:rPr>
-              <a:t>正</a:t>
-            </a:r>
-            <a:r>
-              <a:rPr lang="en-US" sz="4400" b="1" dirty="0" smtClean="0">
+              <a:rPr lang="zh-CN" altLang="en-US" sz="4400" b="1" dirty="0">
+                <a:solidFill>
+                  <a:srgbClr val="000066"/>
+                </a:solidFill>
+                <a:latin typeface="Microsoft JhengHei" panose="020B0604030504040204" pitchFamily="34" charset="-120"/>
+                <a:ea typeface="Microsoft JhengHei" panose="020B0604030504040204" pitchFamily="34" charset="-120"/>
+              </a:rPr>
+              <a:t>正歌</a:t>
+            </a:r>
+            <a:r>
+              <a:rPr lang="en-US" sz="4400" b="1" dirty="0">
                 <a:solidFill>
                   <a:srgbClr val="000066"/>
                 </a:solidFill>
@@ -4010,7 +3931,7 @@
               <a:buNone/>
             </a:pPr>
             <a:r>
-              <a:rPr lang="zh-CN" altLang="en-US" sz="6400" b="1" dirty="0" smtClean="0">
+              <a:rPr lang="zh-CN" altLang="en-US" sz="6400" b="1" dirty="0">
                 <a:solidFill>
                   <a:srgbClr val="000066"/>
                 </a:solidFill>
@@ -4020,16 +3941,6 @@
               <a:t>祢</a:t>
             </a:r>
             <a:r>
-              <a:rPr lang="zh-TW" altLang="en-US" sz="6400" b="1" dirty="0" smtClean="0">
-                <a:solidFill>
-                  <a:srgbClr val="000066"/>
-                </a:solidFill>
-                <a:latin typeface="Microsoft JhengHei" panose="020B0604030504040204" pitchFamily="34" charset="-120"/>
-                <a:ea typeface="Microsoft JhengHei" panose="020B0604030504040204" pitchFamily="34" charset="-120"/>
-              </a:rPr>
-              <a:t>是</a:t>
-            </a:r>
-            <a:r>
               <a:rPr lang="zh-TW" altLang="en-US" sz="6400" b="1" dirty="0">
                 <a:solidFill>
                   <a:srgbClr val="000066"/>
@@ -4037,7 +3948,7 @@
                 <a:latin typeface="Microsoft JhengHei" panose="020B0604030504040204" pitchFamily="34" charset="-120"/>
                 <a:ea typeface="Microsoft JhengHei" panose="020B0604030504040204" pitchFamily="34" charset="-120"/>
               </a:rPr>
-              <a:t>我的牧者我所倚靠</a:t>
+              <a:t>是我的牧者我所倚靠</a:t>
             </a:r>
             <a:endParaRPr lang="en-US" altLang="zh-TW" sz="6400" b="1" dirty="0">
               <a:solidFill>
@@ -4073,7 +3984,7 @@
           <a:p>
             <a:pPr algn="ctr"/>
             <a:r>
-              <a:rPr lang="en-US" sz="4400" b="1" dirty="0" smtClean="0">
+              <a:rPr lang="en-US" sz="4400" b="1" dirty="0">
                 <a:solidFill>
                   <a:srgbClr val="000066"/>
                 </a:solidFill>
@@ -4083,17 +3994,17 @@
               <a:t>( </a:t>
             </a:r>
             <a:r>
-              <a:rPr lang="zh-CN" altLang="en-US" sz="4400" b="1" dirty="0" smtClean="0">
-                <a:solidFill>
-                  <a:srgbClr val="000066"/>
-                </a:solidFill>
-                <a:latin typeface="Microsoft JhengHei" panose="020B0604030504040204" pitchFamily="34" charset="-120"/>
-                <a:ea typeface="Microsoft JhengHei" panose="020B0604030504040204" pitchFamily="34" charset="-120"/>
-              </a:rPr>
-              <a:t>正</a:t>
-            </a:r>
-            <a:r>
-              <a:rPr lang="en-US" sz="4400" b="1" dirty="0" smtClean="0">
+              <a:rPr lang="zh-CN" altLang="en-US" sz="4400" b="1" dirty="0">
+                <a:solidFill>
+                  <a:srgbClr val="000066"/>
+                </a:solidFill>
+                <a:latin typeface="Microsoft JhengHei" panose="020B0604030504040204" pitchFamily="34" charset="-120"/>
+                <a:ea typeface="Microsoft JhengHei" panose="020B0604030504040204" pitchFamily="34" charset="-120"/>
+              </a:rPr>
+              <a:t>正歌</a:t>
+            </a:r>
+            <a:r>
+              <a:rPr lang="en-US" sz="4400" b="1" dirty="0">
                 <a:solidFill>
                   <a:srgbClr val="000066"/>
                 </a:solidFill>
@@ -4196,20 +4107,10 @@
                 <a:latin typeface="Microsoft JhengHei" panose="020B0604030504040204" pitchFamily="34" charset="-120"/>
                 <a:ea typeface="Microsoft JhengHei" panose="020B0604030504040204" pitchFamily="34" charset="-120"/>
               </a:rPr>
-              <a:t>我</a:t>
-            </a:r>
-            <a:r>
-              <a:rPr lang="zh-TW" altLang="en-US" sz="6400" b="1" dirty="0" smtClean="0">
-                <a:solidFill>
-                  <a:srgbClr val="000066"/>
-                </a:solidFill>
-                <a:latin typeface="Microsoft JhengHei" panose="020B0604030504040204" pitchFamily="34" charset="-120"/>
-                <a:ea typeface="Microsoft JhengHei" panose="020B0604030504040204" pitchFamily="34" charset="-120"/>
-              </a:rPr>
-              <a:t>知</a:t>
-            </a:r>
-            <a:r>
-              <a:rPr lang="zh-CN" altLang="en-US" sz="6400" b="1" dirty="0" smtClean="0">
+              <a:t>我知</a:t>
+            </a:r>
+            <a:r>
+              <a:rPr lang="zh-CN" altLang="en-US" sz="6400" b="1" dirty="0">
                 <a:solidFill>
                   <a:srgbClr val="000066"/>
                 </a:solidFill>
@@ -4219,16 +4120,6 @@
               <a:t>祢</a:t>
             </a:r>
             <a:r>
-              <a:rPr lang="zh-TW" altLang="en-US" sz="6400" b="1" dirty="0" smtClean="0">
-                <a:solidFill>
-                  <a:srgbClr val="000066"/>
-                </a:solidFill>
-                <a:latin typeface="Microsoft JhengHei" panose="020B0604030504040204" pitchFamily="34" charset="-120"/>
-                <a:ea typeface="Microsoft JhengHei" panose="020B0604030504040204" pitchFamily="34" charset="-120"/>
-              </a:rPr>
-              <a:t>永</a:t>
-            </a:r>
-            <a:r>
               <a:rPr lang="zh-TW" altLang="en-US" sz="6400" b="1" dirty="0">
                 <a:solidFill>
                   <a:srgbClr val="000066"/>
@@ -4236,7 +4127,7 @@
                 <a:latin typeface="Microsoft JhengHei" panose="020B0604030504040204" pitchFamily="34" charset="-120"/>
                 <a:ea typeface="Microsoft JhengHei" panose="020B0604030504040204" pitchFamily="34" charset="-120"/>
               </a:rPr>
-              <a:t>遠在身邊</a:t>
+              <a:t>永遠在身邊</a:t>
             </a:r>
             <a:endParaRPr lang="vi-VN" sz="6400" b="1" dirty="0">
               <a:solidFill>
@@ -4272,7 +4163,7 @@
           <a:p>
             <a:pPr algn="ctr"/>
             <a:r>
-              <a:rPr lang="en-US" sz="4400" b="1" dirty="0" smtClean="0">
+              <a:rPr lang="en-US" sz="4400" b="1" dirty="0">
                 <a:solidFill>
                   <a:srgbClr val="000066"/>
                 </a:solidFill>
@@ -4282,17 +4173,17 @@
               <a:t>( </a:t>
             </a:r>
             <a:r>
-              <a:rPr lang="zh-CN" altLang="en-US" sz="4400" b="1" dirty="0" smtClean="0">
-                <a:solidFill>
-                  <a:srgbClr val="000066"/>
-                </a:solidFill>
-                <a:latin typeface="Microsoft JhengHei" panose="020B0604030504040204" pitchFamily="34" charset="-120"/>
-                <a:ea typeface="Microsoft JhengHei" panose="020B0604030504040204" pitchFamily="34" charset="-120"/>
-              </a:rPr>
-              <a:t>前副</a:t>
-            </a:r>
-            <a:r>
-              <a:rPr lang="en-US" sz="4400" b="1" dirty="0" smtClean="0">
+              <a:rPr lang="zh-CN" altLang="en-US" sz="4400" b="1" dirty="0">
+                <a:solidFill>
+                  <a:srgbClr val="000066"/>
+                </a:solidFill>
+                <a:latin typeface="Microsoft JhengHei" panose="020B0604030504040204" pitchFamily="34" charset="-120"/>
+                <a:ea typeface="Microsoft JhengHei" panose="020B0604030504040204" pitchFamily="34" charset="-120"/>
+              </a:rPr>
+              <a:t>前副歌</a:t>
+            </a:r>
+            <a:r>
+              <a:rPr lang="en-US" sz="4400" b="1" dirty="0">
                 <a:solidFill>
                   <a:srgbClr val="000066"/>
                 </a:solidFill>
@@ -4366,7 +4257,7 @@
               <a:buNone/>
             </a:pPr>
             <a:r>
-              <a:rPr lang="zh-TW" altLang="en-US" sz="6400" b="1" dirty="0" smtClean="0">
+              <a:rPr lang="zh-TW" altLang="en-US" sz="6400" b="1" dirty="0">
                 <a:solidFill>
                   <a:srgbClr val="000066"/>
                 </a:solidFill>
@@ -4376,7 +4267,7 @@
               <a:t>主</a:t>
             </a:r>
             <a:r>
-              <a:rPr lang="zh-CN" altLang="en-US" sz="6400" b="1" dirty="0" smtClean="0">
+              <a:rPr lang="zh-CN" altLang="en-US" sz="6400" b="1" dirty="0">
                 <a:solidFill>
                   <a:srgbClr val="000066"/>
                 </a:solidFill>
@@ -4386,16 +4277,6 @@
               <a:t>祢</a:t>
             </a:r>
             <a:r>
-              <a:rPr lang="zh-TW" altLang="en-US" sz="6400" b="1" dirty="0" smtClean="0">
-                <a:solidFill>
-                  <a:srgbClr val="000066"/>
-                </a:solidFill>
-                <a:latin typeface="Microsoft JhengHei" panose="020B0604030504040204" pitchFamily="34" charset="-120"/>
-                <a:ea typeface="Microsoft JhengHei" panose="020B0604030504040204" pitchFamily="34" charset="-120"/>
-              </a:rPr>
-              <a:t>永</a:t>
-            </a:r>
-            <a:r>
               <a:rPr lang="zh-TW" altLang="en-US" sz="6400" b="1" dirty="0">
                 <a:solidFill>
                   <a:srgbClr val="000066"/>
@@ -4403,7 +4284,7 @@
                 <a:latin typeface="Microsoft JhengHei" panose="020B0604030504040204" pitchFamily="34" charset="-120"/>
                 <a:ea typeface="Microsoft JhengHei" panose="020B0604030504040204" pitchFamily="34" charset="-120"/>
               </a:rPr>
-              <a:t>遠與我同在</a:t>
+              <a:t>永遠與我同在</a:t>
             </a:r>
             <a:endParaRPr lang="en-US" altLang="zh-TW" sz="6400" b="1" dirty="0">
               <a:solidFill>
@@ -4418,7 +4299,7 @@
               <a:buNone/>
             </a:pPr>
             <a:r>
-              <a:rPr lang="zh-TW" altLang="en-US" sz="6400" b="1" dirty="0" smtClean="0">
+              <a:rPr lang="zh-TW" altLang="en-US" sz="6400" b="1" dirty="0">
                 <a:solidFill>
                   <a:srgbClr val="000066"/>
                 </a:solidFill>
@@ -4428,7 +4309,7 @@
               <a:t>在</a:t>
             </a:r>
             <a:r>
-              <a:rPr lang="zh-CN" altLang="en-US" sz="6400" b="1" dirty="0" smtClean="0">
+              <a:rPr lang="zh-CN" altLang="en-US" sz="6400" b="1" dirty="0">
                 <a:solidFill>
                   <a:srgbClr val="000066"/>
                 </a:solidFill>
@@ -4438,16 +4319,6 @@
               <a:t>祢</a:t>
             </a:r>
             <a:r>
-              <a:rPr lang="zh-TW" altLang="en-US" sz="6400" b="1" dirty="0" smtClean="0">
-                <a:solidFill>
-                  <a:srgbClr val="000066"/>
-                </a:solidFill>
-                <a:latin typeface="Microsoft JhengHei" panose="020B0604030504040204" pitchFamily="34" charset="-120"/>
-                <a:ea typeface="Microsoft JhengHei" panose="020B0604030504040204" pitchFamily="34" charset="-120"/>
-              </a:rPr>
-              <a:t>裡</a:t>
-            </a:r>
-            <a:r>
               <a:rPr lang="zh-TW" altLang="en-US" sz="6400" b="1" dirty="0">
                 <a:solidFill>
                   <a:srgbClr val="000066"/>
@@ -4455,7 +4326,7 @@
                 <a:latin typeface="Microsoft JhengHei" panose="020B0604030504040204" pitchFamily="34" charset="-120"/>
                 <a:ea typeface="Microsoft JhengHei" panose="020B0604030504040204" pitchFamily="34" charset="-120"/>
               </a:rPr>
-              <a:t>面沒有改變</a:t>
+              <a:t>裡面沒有改變</a:t>
             </a:r>
             <a:endParaRPr lang="en-US" altLang="zh-TW" sz="6400" b="1" dirty="0">
               <a:solidFill>
@@ -4491,7 +4362,7 @@
           <a:p>
             <a:pPr algn="ctr"/>
             <a:r>
-              <a:rPr lang="en-US" sz="4400" b="1" dirty="0" smtClean="0">
+              <a:rPr lang="en-US" sz="4400" b="1" dirty="0">
                 <a:solidFill>
                   <a:srgbClr val="000066"/>
                 </a:solidFill>
@@ -4501,17 +4372,17 @@
               <a:t>( </a:t>
             </a:r>
             <a:r>
-              <a:rPr lang="zh-CN" altLang="en-US" sz="4400" b="1" dirty="0" smtClean="0">
-                <a:solidFill>
-                  <a:srgbClr val="000066"/>
-                </a:solidFill>
-                <a:latin typeface="Microsoft JhengHei" panose="020B0604030504040204" pitchFamily="34" charset="-120"/>
-                <a:ea typeface="Microsoft JhengHei" panose="020B0604030504040204" pitchFamily="34" charset="-120"/>
-              </a:rPr>
-              <a:t>副</a:t>
-            </a:r>
-            <a:r>
-              <a:rPr lang="en-US" sz="4400" b="1" dirty="0" smtClean="0">
+              <a:rPr lang="zh-CN" altLang="en-US" sz="4400" b="1" dirty="0">
+                <a:solidFill>
+                  <a:srgbClr val="000066"/>
+                </a:solidFill>
+                <a:latin typeface="Microsoft JhengHei" panose="020B0604030504040204" pitchFamily="34" charset="-120"/>
+                <a:ea typeface="Microsoft JhengHei" panose="020B0604030504040204" pitchFamily="34" charset="-120"/>
+              </a:rPr>
+              <a:t>副歌</a:t>
+            </a:r>
+            <a:r>
+              <a:rPr lang="en-US" sz="4400" b="1" dirty="0">
                 <a:solidFill>
                   <a:srgbClr val="000066"/>
                 </a:solidFill>
@@ -4585,7 +4456,7 @@
               <a:buNone/>
             </a:pPr>
             <a:r>
-              <a:rPr lang="zh-CN" altLang="en-US" sz="6400" b="1" dirty="0" smtClean="0">
+              <a:rPr lang="zh-CN" altLang="en-US" sz="6400" b="1" dirty="0">
                 <a:solidFill>
                   <a:srgbClr val="000066"/>
                 </a:solidFill>
@@ -4595,16 +4466,6 @@
               <a:t>祢</a:t>
             </a:r>
             <a:r>
-              <a:rPr lang="zh-TW" altLang="en-US" sz="6400" b="1" dirty="0" smtClean="0">
-                <a:solidFill>
-                  <a:srgbClr val="000066"/>
-                </a:solidFill>
-                <a:latin typeface="Microsoft JhengHei" panose="020B0604030504040204" pitchFamily="34" charset="-120"/>
-                <a:ea typeface="Microsoft JhengHei" panose="020B0604030504040204" pitchFamily="34" charset="-120"/>
-              </a:rPr>
-              <a:t>的</a:t>
-            </a:r>
-            <a:r>
               <a:rPr lang="zh-TW" altLang="en-US" sz="6400" b="1" dirty="0">
                 <a:solidFill>
                   <a:srgbClr val="000066"/>
@@ -4612,7 +4473,7 @@
                 <a:latin typeface="Microsoft JhengHei" panose="020B0604030504040204" pitchFamily="34" charset="-120"/>
                 <a:ea typeface="Microsoft JhengHei" panose="020B0604030504040204" pitchFamily="34" charset="-120"/>
               </a:rPr>
-              <a:t>堅定  從昨日到今日</a:t>
+              <a:t>的堅定  從昨日到今日</a:t>
             </a:r>
             <a:endParaRPr lang="en-US" altLang="zh-TW" sz="6400" b="1" dirty="0">
               <a:solidFill>
@@ -4670,7 +4531,7 @@
           <a:p>
             <a:pPr algn="ctr"/>
             <a:r>
-              <a:rPr lang="en-US" sz="4400" b="1" dirty="0" smtClean="0">
+              <a:rPr lang="en-US" sz="4400" b="1" dirty="0">
                 <a:solidFill>
                   <a:srgbClr val="000066"/>
                 </a:solidFill>
@@ -4680,17 +4541,17 @@
               <a:t>( </a:t>
             </a:r>
             <a:r>
-              <a:rPr lang="zh-CN" altLang="en-US" sz="4400" b="1" dirty="0" smtClean="0">
-                <a:solidFill>
-                  <a:srgbClr val="000066"/>
-                </a:solidFill>
-                <a:latin typeface="Microsoft JhengHei" panose="020B0604030504040204" pitchFamily="34" charset="-120"/>
-                <a:ea typeface="Microsoft JhengHei" panose="020B0604030504040204" pitchFamily="34" charset="-120"/>
-              </a:rPr>
-              <a:t>副</a:t>
-            </a:r>
-            <a:r>
-              <a:rPr lang="en-US" sz="4400" b="1" dirty="0" smtClean="0">
+              <a:rPr lang="zh-CN" altLang="en-US" sz="4400" b="1" dirty="0">
+                <a:solidFill>
+                  <a:srgbClr val="000066"/>
+                </a:solidFill>
+                <a:latin typeface="Microsoft JhengHei" panose="020B0604030504040204" pitchFamily="34" charset="-120"/>
+                <a:ea typeface="Microsoft JhengHei" panose="020B0604030504040204" pitchFamily="34" charset="-120"/>
+              </a:rPr>
+              <a:t>副歌</a:t>
+            </a:r>
+            <a:r>
+              <a:rPr lang="en-US" sz="4400" b="1" dirty="0">
                 <a:solidFill>
                   <a:srgbClr val="000066"/>
                 </a:solidFill>
@@ -4764,7 +4625,7 @@
               <a:buNone/>
             </a:pPr>
             <a:r>
-              <a:rPr lang="zh-TW" altLang="en-US" sz="6400" b="1" dirty="0" smtClean="0">
+              <a:rPr lang="zh-TW" altLang="en-US" sz="6400" b="1" dirty="0">
                 <a:solidFill>
                   <a:srgbClr val="000066"/>
                 </a:solidFill>
@@ -4774,7 +4635,7 @@
               <a:t>靠</a:t>
             </a:r>
             <a:r>
-              <a:rPr lang="zh-CN" altLang="en-US" sz="6400" b="1" dirty="0" smtClean="0">
+              <a:rPr lang="zh-CN" altLang="en-US" sz="6400" b="1" dirty="0">
                 <a:solidFill>
                   <a:srgbClr val="000066"/>
                 </a:solidFill>
@@ -4784,16 +4645,6 @@
               <a:t>祢</a:t>
             </a:r>
             <a:r>
-              <a:rPr lang="zh-TW" altLang="en-US" sz="6400" b="1" dirty="0" smtClean="0">
-                <a:solidFill>
-                  <a:srgbClr val="000066"/>
-                </a:solidFill>
-                <a:latin typeface="Microsoft JhengHei" panose="020B0604030504040204" pitchFamily="34" charset="-120"/>
-                <a:ea typeface="Microsoft JhengHei" panose="020B0604030504040204" pitchFamily="34" charset="-120"/>
-              </a:rPr>
-              <a:t>豐</a:t>
-            </a:r>
-            <a:r>
               <a:rPr lang="zh-TW" altLang="en-US" sz="6400" b="1" dirty="0">
                 <a:solidFill>
                   <a:srgbClr val="000066"/>
@@ -4801,7 +4652,7 @@
                 <a:latin typeface="Microsoft JhengHei" panose="020B0604030504040204" pitchFamily="34" charset="-120"/>
                 <a:ea typeface="Microsoft JhengHei" panose="020B0604030504040204" pitchFamily="34" charset="-120"/>
               </a:rPr>
-              <a:t>盛應許站立</a:t>
+              <a:t>豐盛應許站立</a:t>
             </a:r>
             <a:endParaRPr lang="en-US" altLang="zh-TW" sz="6400" b="1" dirty="0">
               <a:solidFill>
@@ -4823,20 +4674,10 @@
                 <a:latin typeface="Microsoft JhengHei" panose="020B0604030504040204" pitchFamily="34" charset="-120"/>
                 <a:ea typeface="Microsoft JhengHei" panose="020B0604030504040204" pitchFamily="34" charset="-120"/>
               </a:rPr>
-              <a:t>我的未來</a:t>
-            </a:r>
-            <a:r>
-              <a:rPr lang="zh-TW" altLang="en-US" sz="6400" b="1" dirty="0" smtClean="0">
-                <a:solidFill>
-                  <a:srgbClr val="000066"/>
-                </a:solidFill>
-                <a:latin typeface="Microsoft JhengHei" panose="020B0604030504040204" pitchFamily="34" charset="-120"/>
-                <a:ea typeface="Microsoft JhengHei" panose="020B0604030504040204" pitchFamily="34" charset="-120"/>
-              </a:rPr>
-              <a:t>在</a:t>
-            </a:r>
-            <a:r>
-              <a:rPr lang="zh-CN" altLang="en-US" sz="6400" b="1" dirty="0" smtClean="0">
+              <a:t>我的未來在</a:t>
+            </a:r>
+            <a:r>
+              <a:rPr lang="zh-CN" altLang="en-US" sz="6400" b="1" dirty="0">
                 <a:solidFill>
                   <a:srgbClr val="000066"/>
                 </a:solidFill>
@@ -4846,16 +4687,6 @@
               <a:t>祢</a:t>
             </a:r>
             <a:r>
-              <a:rPr lang="zh-TW" altLang="en-US" sz="6400" b="1" dirty="0" smtClean="0">
-                <a:solidFill>
-                  <a:srgbClr val="000066"/>
-                </a:solidFill>
-                <a:latin typeface="Microsoft JhengHei" panose="020B0604030504040204" pitchFamily="34" charset="-120"/>
-                <a:ea typeface="Microsoft JhengHei" panose="020B0604030504040204" pitchFamily="34" charset="-120"/>
-              </a:rPr>
-              <a:t>手</a:t>
-            </a:r>
-            <a:r>
               <a:rPr lang="zh-TW" altLang="en-US" sz="6400" b="1" dirty="0">
                 <a:solidFill>
                   <a:srgbClr val="000066"/>
@@ -4863,7 +4694,7 @@
                 <a:latin typeface="Microsoft JhengHei" panose="020B0604030504040204" pitchFamily="34" charset="-120"/>
                 <a:ea typeface="Microsoft JhengHei" panose="020B0604030504040204" pitchFamily="34" charset="-120"/>
               </a:rPr>
-              <a:t>中</a:t>
+              <a:t>手中</a:t>
             </a:r>
             <a:endParaRPr lang="en-US" altLang="zh-TW" sz="6400" b="1" dirty="0">
               <a:solidFill>
@@ -4899,7 +4730,7 @@
           <a:p>
             <a:pPr algn="ctr"/>
             <a:r>
-              <a:rPr lang="en-US" sz="4400" b="1" dirty="0" smtClean="0">
+              <a:rPr lang="en-US" sz="4400" b="1" dirty="0">
                 <a:solidFill>
                   <a:srgbClr val="000066"/>
                 </a:solidFill>
@@ -4909,17 +4740,17 @@
               <a:t>( </a:t>
             </a:r>
             <a:r>
-              <a:rPr lang="zh-CN" altLang="en-US" sz="4400" b="1" dirty="0" smtClean="0">
-                <a:solidFill>
-                  <a:srgbClr val="000066"/>
-                </a:solidFill>
-                <a:latin typeface="Microsoft JhengHei" panose="020B0604030504040204" pitchFamily="34" charset="-120"/>
-                <a:ea typeface="Microsoft JhengHei" panose="020B0604030504040204" pitchFamily="34" charset="-120"/>
-              </a:rPr>
-              <a:t>副</a:t>
-            </a:r>
-            <a:r>
-              <a:rPr lang="en-US" sz="4400" b="1" dirty="0" smtClean="0">
+              <a:rPr lang="zh-CN" altLang="en-US" sz="4400" b="1" dirty="0">
+                <a:solidFill>
+                  <a:srgbClr val="000066"/>
+                </a:solidFill>
+                <a:latin typeface="Microsoft JhengHei" panose="020B0604030504040204" pitchFamily="34" charset="-120"/>
+                <a:ea typeface="Microsoft JhengHei" panose="020B0604030504040204" pitchFamily="34" charset="-120"/>
+              </a:rPr>
+              <a:t>副歌</a:t>
+            </a:r>
+            <a:r>
+              <a:rPr lang="en-US" sz="4400" b="1" dirty="0">
                 <a:solidFill>
                   <a:srgbClr val="000066"/>
                 </a:solidFill>
